--- a/Formula 1.pptx
+++ b/Formula 1.pptx
@@ -9,6 +9,10 @@
     <p:sldId id="257" r:id="rId3"/>
     <p:sldId id="258" r:id="rId4"/>
     <p:sldId id="259" r:id="rId5"/>
+    <p:sldId id="260" r:id="rId6"/>
+    <p:sldId id="262" r:id="rId7"/>
+    <p:sldId id="261" r:id="rId8"/>
+    <p:sldId id="263" r:id="rId9"/>
   </p:sldIdLst>
   <p:sldSz cx="12192000" cy="6858000"/>
   <p:notesSz cx="6858000" cy="9144000"/>
@@ -107,6 +111,11 @@
       </a:defRPr>
     </a:lvl9pPr>
   </p:defaultTextStyle>
+  <p:extLst>
+    <p:ext uri="{EFAFB233-063F-42B5-8137-9DF3F51BA10A}">
+      <p15:sldGuideLst xmlns:p15="http://schemas.microsoft.com/office/powerpoint/2012/main"/>
+    </p:ext>
+  </p:extLst>
 </p:presentation>
 </file>
 
@@ -295,7 +304,7 @@
           <a:p>
             <a:fld id="{9329CC1E-3194-42D4-8A08-189BF6AB5B98}" type="datetimeFigureOut">
               <a:rPr lang="hu-HU" smtClean="0"/>
-              <a:t>2026.04.21.</a:t>
+              <a:t>2026.04.27.</a:t>
             </a:fld>
             <a:endParaRPr lang="hu-HU"/>
           </a:p>
@@ -593,7 +602,7 @@
           <a:p>
             <a:fld id="{9329CC1E-3194-42D4-8A08-189BF6AB5B98}" type="datetimeFigureOut">
               <a:rPr lang="hu-HU" smtClean="0"/>
-              <a:t>2026.04.21.</a:t>
+              <a:t>2026.04.27.</a:t>
             </a:fld>
             <a:endParaRPr lang="hu-HU"/>
           </a:p>
@@ -785,7 +794,7 @@
           <a:p>
             <a:fld id="{9329CC1E-3194-42D4-8A08-189BF6AB5B98}" type="datetimeFigureOut">
               <a:rPr lang="hu-HU" smtClean="0"/>
-              <a:t>2026.04.21.</a:t>
+              <a:t>2026.04.27.</a:t>
             </a:fld>
             <a:endParaRPr lang="hu-HU"/>
           </a:p>
@@ -1046,7 +1055,7 @@
           <a:p>
             <a:fld id="{9329CC1E-3194-42D4-8A08-189BF6AB5B98}" type="datetimeFigureOut">
               <a:rPr lang="hu-HU" smtClean="0"/>
-              <a:t>2026.04.21.</a:t>
+              <a:t>2026.04.27.</a:t>
             </a:fld>
             <a:endParaRPr lang="hu-HU"/>
           </a:p>
@@ -1470,7 +1479,7 @@
           <a:p>
             <a:fld id="{9329CC1E-3194-42D4-8A08-189BF6AB5B98}" type="datetimeFigureOut">
               <a:rPr lang="hu-HU" smtClean="0"/>
-              <a:t>2026.04.21.</a:t>
+              <a:t>2026.04.27.</a:t>
             </a:fld>
             <a:endParaRPr lang="hu-HU"/>
           </a:p>
@@ -2007,7 +2016,7 @@
           <a:p>
             <a:fld id="{9329CC1E-3194-42D4-8A08-189BF6AB5B98}" type="datetimeFigureOut">
               <a:rPr lang="hu-HU" smtClean="0"/>
-              <a:t>2026.04.21.</a:t>
+              <a:t>2026.04.27.</a:t>
             </a:fld>
             <a:endParaRPr lang="hu-HU"/>
           </a:p>
@@ -2871,7 +2880,7 @@
           <a:p>
             <a:fld id="{9329CC1E-3194-42D4-8A08-189BF6AB5B98}" type="datetimeFigureOut">
               <a:rPr lang="hu-HU" smtClean="0"/>
-              <a:t>2026.04.21.</a:t>
+              <a:t>2026.04.27.</a:t>
             </a:fld>
             <a:endParaRPr lang="hu-HU"/>
           </a:p>
@@ -3041,7 +3050,7 @@
           <a:p>
             <a:fld id="{9329CC1E-3194-42D4-8A08-189BF6AB5B98}" type="datetimeFigureOut">
               <a:rPr lang="hu-HU" smtClean="0"/>
-              <a:t>2026.04.21.</a:t>
+              <a:t>2026.04.27.</a:t>
             </a:fld>
             <a:endParaRPr lang="hu-HU"/>
           </a:p>
@@ -3225,7 +3234,7 @@
           <a:p>
             <a:fld id="{9329CC1E-3194-42D4-8A08-189BF6AB5B98}" type="datetimeFigureOut">
               <a:rPr lang="hu-HU" smtClean="0"/>
-              <a:t>2026.04.21.</a:t>
+              <a:t>2026.04.27.</a:t>
             </a:fld>
             <a:endParaRPr lang="hu-HU"/>
           </a:p>
@@ -3395,7 +3404,7 @@
           <a:p>
             <a:fld id="{9329CC1E-3194-42D4-8A08-189BF6AB5B98}" type="datetimeFigureOut">
               <a:rPr lang="hu-HU" smtClean="0"/>
-              <a:t>2026.04.21.</a:t>
+              <a:t>2026.04.27.</a:t>
             </a:fld>
             <a:endParaRPr lang="hu-HU"/>
           </a:p>
@@ -3639,7 +3648,7 @@
           <a:p>
             <a:fld id="{9329CC1E-3194-42D4-8A08-189BF6AB5B98}" type="datetimeFigureOut">
               <a:rPr lang="hu-HU" smtClean="0"/>
-              <a:t>2026.04.21.</a:t>
+              <a:t>2026.04.27.</a:t>
             </a:fld>
             <a:endParaRPr lang="hu-HU"/>
           </a:p>
@@ -3875,7 +3884,7 @@
           <a:p>
             <a:fld id="{9329CC1E-3194-42D4-8A08-189BF6AB5B98}" type="datetimeFigureOut">
               <a:rPr lang="hu-HU" smtClean="0"/>
-              <a:t>2026.04.21.</a:t>
+              <a:t>2026.04.27.</a:t>
             </a:fld>
             <a:endParaRPr lang="hu-HU"/>
           </a:p>
@@ -4341,7 +4350,7 @@
           <a:p>
             <a:fld id="{9329CC1E-3194-42D4-8A08-189BF6AB5B98}" type="datetimeFigureOut">
               <a:rPr lang="hu-HU" smtClean="0"/>
-              <a:t>2026.04.21.</a:t>
+              <a:t>2026.04.27.</a:t>
             </a:fld>
             <a:endParaRPr lang="hu-HU"/>
           </a:p>
@@ -4459,7 +4468,7 @@
           <a:p>
             <a:fld id="{9329CC1E-3194-42D4-8A08-189BF6AB5B98}" type="datetimeFigureOut">
               <a:rPr lang="hu-HU" smtClean="0"/>
-              <a:t>2026.04.21.</a:t>
+              <a:t>2026.04.27.</a:t>
             </a:fld>
             <a:endParaRPr lang="hu-HU"/>
           </a:p>
@@ -4554,7 +4563,7 @@
           <a:p>
             <a:fld id="{9329CC1E-3194-42D4-8A08-189BF6AB5B98}" type="datetimeFigureOut">
               <a:rPr lang="hu-HU" smtClean="0"/>
-              <a:t>2026.04.21.</a:t>
+              <a:t>2026.04.27.</a:t>
             </a:fld>
             <a:endParaRPr lang="hu-HU"/>
           </a:p>
@@ -4809,7 +4818,7 @@
           <a:p>
             <a:fld id="{9329CC1E-3194-42D4-8A08-189BF6AB5B98}" type="datetimeFigureOut">
               <a:rPr lang="hu-HU" smtClean="0"/>
-              <a:t>2026.04.21.</a:t>
+              <a:t>2026.04.27.</a:t>
             </a:fld>
             <a:endParaRPr lang="hu-HU"/>
           </a:p>
@@ -5109,7 +5118,7 @@
           <a:p>
             <a:fld id="{9329CC1E-3194-42D4-8A08-189BF6AB5B98}" type="datetimeFigureOut">
               <a:rPr lang="hu-HU" smtClean="0"/>
-              <a:t>2026.04.21.</a:t>
+              <a:t>2026.04.27.</a:t>
             </a:fld>
             <a:endParaRPr lang="hu-HU"/>
           </a:p>
@@ -5343,7 +5352,7 @@
           <a:p>
             <a:fld id="{9329CC1E-3194-42D4-8A08-189BF6AB5B98}" type="datetimeFigureOut">
               <a:rPr lang="hu-HU" smtClean="0"/>
-              <a:t>2026.04.21.</a:t>
+              <a:t>2026.04.27.</a:t>
             </a:fld>
             <a:endParaRPr lang="hu-HU"/>
           </a:p>
@@ -6099,13 +6108,13 @@
   <p:clrMapOvr>
     <a:masterClrMapping/>
   </p:clrMapOvr>
-  <mc:AlternateContent xmlns:mc="http://schemas.openxmlformats.org/markup-compatibility/2006">
-    <mc:Choice xmlns:p15="http://schemas.microsoft.com/office/powerpoint/2012/main" Requires="p15">
+  <mc:AlternateContent xmlns:mc="http://schemas.openxmlformats.org/markup-compatibility/2006" xmlns:p15="http://schemas.microsoft.com/office/powerpoint/2012/main">
+    <mc:Choice Requires="p15">
       <p:transition xmlns:p14="http://schemas.microsoft.com/office/powerpoint/2010/main" spd="slow" p14:dur="6000">
         <p15:prstTrans prst="curtains"/>
       </p:transition>
     </mc:Choice>
-    <mc:Fallback>
+    <mc:Fallback xmlns="">
       <p:transition spd="slow">
         <p:fade/>
       </p:transition>
@@ -6297,13 +6306,13 @@
   <p:clrMapOvr>
     <a:masterClrMapping/>
   </p:clrMapOvr>
-  <mc:AlternateContent xmlns:mc="http://schemas.openxmlformats.org/markup-compatibility/2006">
-    <mc:Choice xmlns:p14="http://schemas.microsoft.com/office/powerpoint/2010/main" Requires="p14">
+  <mc:AlternateContent xmlns:mc="http://schemas.openxmlformats.org/markup-compatibility/2006" xmlns:p14="http://schemas.microsoft.com/office/powerpoint/2010/main">
+    <mc:Choice Requires="p14">
       <p:transition spd="slow" p14:dur="4400">
         <p14:honeycomb/>
       </p:transition>
     </mc:Choice>
-    <mc:Fallback>
+    <mc:Fallback xmlns="">
       <p:transition spd="slow">
         <p:fade/>
       </p:transition>
@@ -6392,7 +6401,7 @@
           <a:p>
             <a:r>
               <a:rPr lang="hu-HU" sz="2800" dirty="0"/>
-              <a:t>Második oldal:</a:t>
+              <a:t>Első oldal:</a:t>
             </a:r>
           </a:p>
         </p:txBody>
@@ -6533,13 +6542,13 @@
   <p:clrMapOvr>
     <a:masterClrMapping/>
   </p:clrMapOvr>
-  <mc:AlternateContent xmlns:mc="http://schemas.openxmlformats.org/markup-compatibility/2006">
-    <mc:Choice xmlns:p14="http://schemas.microsoft.com/office/powerpoint/2010/main" Requires="p14">
+  <mc:AlternateContent xmlns:mc="http://schemas.openxmlformats.org/markup-compatibility/2006" xmlns:p14="http://schemas.microsoft.com/office/powerpoint/2010/main">
+    <mc:Choice Requires="p14">
       <p:transition spd="slow" p14:dur="4000">
         <p14:vortex dir="r"/>
       </p:transition>
     </mc:Choice>
-    <mc:Fallback>
+    <mc:Fallback xmlns="">
       <p:transition spd="slow">
         <p:fade/>
       </p:transition>
@@ -6628,7 +6637,7 @@
           <a:p>
             <a:r>
               <a:rPr lang="hu-HU" sz="2800" dirty="0"/>
-              <a:t>Harmadik oldal:</a:t>
+              <a:t>Második oldal:</a:t>
             </a:r>
           </a:p>
         </p:txBody>
@@ -6677,8 +6686,550 @@
   </p:clrMapOvr>
   <mc:AlternateContent xmlns:mc="http://schemas.openxmlformats.org/markup-compatibility/2006">
     <mc:Choice xmlns:p14="http://schemas.microsoft.com/office/powerpoint/2010/main" Requires="p14">
-      <p:transition spd="slow" p14:dur="4000">
-        <p14:vortex dir="r"/>
+      <p:transition spd="slow" p14:dur="1200">
+        <p:dissolve/>
+      </p:transition>
+    </mc:Choice>
+    <mc:Fallback>
+      <p:transition spd="slow">
+        <p:dissolve/>
+      </p:transition>
+    </mc:Fallback>
+  </mc:AlternateContent>
+</p:sld>
+</file>
+
+<file path=ppt/slides/slide5.xml><?xml version="1.0" encoding="utf-8"?>
+<p:sld xmlns:a="http://schemas.openxmlformats.org/drawingml/2006/main" xmlns:r="http://schemas.openxmlformats.org/officeDocument/2006/relationships" xmlns:p="http://schemas.openxmlformats.org/presentationml/2006/main">
+  <p:cSld>
+    <p:spTree>
+      <p:nvGrpSpPr>
+        <p:cNvPr id="1" name=""/>
+        <p:cNvGrpSpPr/>
+        <p:nvPr/>
+      </p:nvGrpSpPr>
+      <p:grpSpPr>
+        <a:xfrm>
+          <a:off x="0" y="0"/>
+          <a:ext cx="0" cy="0"/>
+          <a:chOff x="0" y="0"/>
+          <a:chExt cx="0" cy="0"/>
+        </a:xfrm>
+      </p:grpSpPr>
+      <p:sp>
+        <p:nvSpPr>
+          <p:cNvPr id="2" name="Cím 1">
+            <a:extLst>
+              <a:ext uri="{FF2B5EF4-FFF2-40B4-BE49-F238E27FC236}">
+                <a16:creationId xmlns:a16="http://schemas.microsoft.com/office/drawing/2014/main" id="{DFD2C2D1-A2B2-4C0E-A861-6E6E49CC5BCD}"/>
+              </a:ext>
+            </a:extLst>
+          </p:cNvPr>
+          <p:cNvSpPr>
+            <a:spLocks noGrp="1"/>
+          </p:cNvSpPr>
+          <p:nvPr>
+            <p:ph type="title"/>
+          </p:nvPr>
+        </p:nvSpPr>
+        <p:spPr>
+          <a:xfrm>
+            <a:off x="919119" y="268375"/>
+            <a:ext cx="10353762" cy="970450"/>
+          </a:xfrm>
+        </p:spPr>
+        <p:txBody>
+          <a:bodyPr/>
+          <a:lstStyle/>
+          <a:p>
+            <a:r>
+              <a:rPr lang="hu-HU" dirty="0"/>
+              <a:t>Weboldal szerkezete </a:t>
+            </a:r>
+          </a:p>
+        </p:txBody>
+      </p:sp>
+      <p:sp>
+        <p:nvSpPr>
+          <p:cNvPr id="5" name="Szövegdoboz 4">
+            <a:extLst>
+              <a:ext uri="{FF2B5EF4-FFF2-40B4-BE49-F238E27FC236}">
+                <a16:creationId xmlns:a16="http://schemas.microsoft.com/office/drawing/2014/main" id="{ADD0E66D-8524-43CD-B0CA-AFD6CAD75061}"/>
+              </a:ext>
+            </a:extLst>
+          </p:cNvPr>
+          <p:cNvSpPr txBox="1"/>
+          <p:nvPr/>
+        </p:nvSpPr>
+        <p:spPr>
+          <a:xfrm>
+            <a:off x="469783" y="1786855"/>
+            <a:ext cx="2944536" cy="523220"/>
+          </a:xfrm>
+          <a:prstGeom prst="rect">
+            <a:avLst/>
+          </a:prstGeom>
+          <a:noFill/>
+        </p:spPr>
+        <p:txBody>
+          <a:bodyPr wrap="square" rtlCol="0">
+            <a:spAutoFit/>
+          </a:bodyPr>
+          <a:lstStyle/>
+          <a:p>
+            <a:r>
+              <a:rPr lang="hu-HU" sz="2800" dirty="0"/>
+              <a:t>Harmadik oldal:</a:t>
+            </a:r>
+          </a:p>
+        </p:txBody>
+      </p:sp>
+      <p:sp>
+        <p:nvSpPr>
+          <p:cNvPr id="4" name="Szövegdoboz 3">
+            <a:extLst>
+              <a:ext uri="{FF2B5EF4-FFF2-40B4-BE49-F238E27FC236}">
+                <a16:creationId xmlns:a16="http://schemas.microsoft.com/office/drawing/2014/main" id="{B6D21078-3960-4A96-976A-2849783EDA2F}"/>
+              </a:ext>
+            </a:extLst>
+          </p:cNvPr>
+          <p:cNvSpPr txBox="1"/>
+          <p:nvPr/>
+        </p:nvSpPr>
+        <p:spPr>
+          <a:xfrm>
+            <a:off x="550003" y="2667699"/>
+            <a:ext cx="2151252" cy="1065401"/>
+          </a:xfrm>
+          <a:prstGeom prst="rect">
+            <a:avLst/>
+          </a:prstGeom>
+          <a:noFill/>
+        </p:spPr>
+        <p:txBody>
+          <a:bodyPr wrap="square" rtlCol="0">
+            <a:spAutoFit/>
+          </a:bodyPr>
+          <a:lstStyle/>
+          <a:p>
+            <a:endParaRPr lang="hu-HU" dirty="0"/>
+          </a:p>
+        </p:txBody>
+      </p:sp>
+    </p:spTree>
+    <p:extLst>
+      <p:ext uri="{BB962C8B-B14F-4D97-AF65-F5344CB8AC3E}">
+        <p14:creationId xmlns:p14="http://schemas.microsoft.com/office/powerpoint/2010/main" val="762542122"/>
+      </p:ext>
+    </p:extLst>
+  </p:cSld>
+  <p:clrMapOvr>
+    <a:masterClrMapping/>
+  </p:clrMapOvr>
+  <mc:AlternateContent xmlns:mc="http://schemas.openxmlformats.org/markup-compatibility/2006">
+    <mc:Choice xmlns:p15="http://schemas.microsoft.com/office/powerpoint/2012/main" Requires="p15">
+      <p:transition xmlns:p14="http://schemas.microsoft.com/office/powerpoint/2010/main" spd="slow" p14:dur="1250">
+        <p15:prstTrans prst="peelOff"/>
+      </p:transition>
+    </mc:Choice>
+    <mc:Fallback>
+      <p:transition spd="slow">
+        <p:fade/>
+      </p:transition>
+    </mc:Fallback>
+  </mc:AlternateContent>
+</p:sld>
+</file>
+
+<file path=ppt/slides/slide6.xml><?xml version="1.0" encoding="utf-8"?>
+<p:sld xmlns:a="http://schemas.openxmlformats.org/drawingml/2006/main" xmlns:r="http://schemas.openxmlformats.org/officeDocument/2006/relationships" xmlns:p="http://schemas.openxmlformats.org/presentationml/2006/main">
+  <p:cSld>
+    <p:spTree>
+      <p:nvGrpSpPr>
+        <p:cNvPr id="1" name=""/>
+        <p:cNvGrpSpPr/>
+        <p:nvPr/>
+      </p:nvGrpSpPr>
+      <p:grpSpPr>
+        <a:xfrm>
+          <a:off x="0" y="0"/>
+          <a:ext cx="0" cy="0"/>
+          <a:chOff x="0" y="0"/>
+          <a:chExt cx="0" cy="0"/>
+        </a:xfrm>
+      </p:grpSpPr>
+      <p:sp>
+        <p:nvSpPr>
+          <p:cNvPr id="2" name="Cím 1">
+            <a:extLst>
+              <a:ext uri="{FF2B5EF4-FFF2-40B4-BE49-F238E27FC236}">
+                <a16:creationId xmlns:a16="http://schemas.microsoft.com/office/drawing/2014/main" id="{AA297CF9-31BA-483F-ADA1-24026B0C0FA2}"/>
+              </a:ext>
+            </a:extLst>
+          </p:cNvPr>
+          <p:cNvSpPr>
+            <a:spLocks noGrp="1"/>
+          </p:cNvSpPr>
+          <p:nvPr>
+            <p:ph type="title"/>
+          </p:nvPr>
+        </p:nvSpPr>
+        <p:spPr/>
+        <p:txBody>
+          <a:bodyPr/>
+          <a:lstStyle/>
+          <a:p>
+            <a:r>
+              <a:rPr lang="hu-HU" dirty="0"/>
+              <a:t>Tesztek</a:t>
+            </a:r>
+          </a:p>
+        </p:txBody>
+      </p:sp>
+      <p:sp>
+        <p:nvSpPr>
+          <p:cNvPr id="7" name="Szövegdoboz 6">
+            <a:extLst>
+              <a:ext uri="{FF2B5EF4-FFF2-40B4-BE49-F238E27FC236}">
+                <a16:creationId xmlns:a16="http://schemas.microsoft.com/office/drawing/2014/main" id="{41ACBA7B-AA6F-4FCA-A4B2-D5B09638F512}"/>
+              </a:ext>
+            </a:extLst>
+          </p:cNvPr>
+          <p:cNvSpPr txBox="1"/>
+          <p:nvPr/>
+        </p:nvSpPr>
+        <p:spPr>
+          <a:xfrm>
+            <a:off x="1098958" y="2063692"/>
+            <a:ext cx="4362275" cy="923330"/>
+          </a:xfrm>
+          <a:prstGeom prst="rect">
+            <a:avLst/>
+          </a:prstGeom>
+          <a:noFill/>
+        </p:spPr>
+        <p:txBody>
+          <a:bodyPr wrap="square" rtlCol="0">
+            <a:spAutoFit/>
+          </a:bodyPr>
+          <a:lstStyle/>
+          <a:p>
+            <a:pPr marL="285750" indent="-285750">
+              <a:buFont typeface="Arial" panose="020B0604020202020204" pitchFamily="34" charset="0"/>
+              <a:buChar char="•"/>
+            </a:pPr>
+            <a:r>
+              <a:rPr lang="hu-HU" dirty="0"/>
+              <a:t>A,B,C lehetőség</a:t>
+            </a:r>
+          </a:p>
+          <a:p>
+            <a:pPr marL="285750" indent="-285750">
+              <a:buFont typeface="Arial" panose="020B0604020202020204" pitchFamily="34" charset="0"/>
+              <a:buChar char="•"/>
+            </a:pPr>
+            <a:r>
+              <a:rPr lang="hu-HU" dirty="0"/>
+              <a:t>Ellenőrzés gomb alul</a:t>
+            </a:r>
+          </a:p>
+          <a:p>
+            <a:pPr marL="285750" indent="-285750">
+              <a:buFont typeface="Arial" panose="020B0604020202020204" pitchFamily="34" charset="0"/>
+              <a:buChar char="•"/>
+            </a:pPr>
+            <a:r>
+              <a:rPr lang="hu-HU" dirty="0"/>
+              <a:t>Az eredményt kiírja</a:t>
+            </a:r>
+          </a:p>
+        </p:txBody>
+      </p:sp>
+      <p:pic>
+        <p:nvPicPr>
+          <p:cNvPr id="8" name="Kép 7">
+            <a:extLst>
+              <a:ext uri="{FF2B5EF4-FFF2-40B4-BE49-F238E27FC236}">
+                <a16:creationId xmlns:a16="http://schemas.microsoft.com/office/drawing/2014/main" id="{45CE081C-BE21-4109-9ABC-464A3FB59D60}"/>
+              </a:ext>
+            </a:extLst>
+          </p:cNvPr>
+          <p:cNvPicPr>
+            <a:picLocks noChangeAspect="1"/>
+          </p:cNvPicPr>
+          <p:nvPr/>
+        </p:nvPicPr>
+        <p:blipFill rotWithShape="1">
+          <a:blip r:embed="rId2"/>
+          <a:srcRect l="3433" t="2446" r="13817" b="4954"/>
+          <a:stretch/>
+        </p:blipFill>
+        <p:spPr>
+          <a:xfrm>
+            <a:off x="4840449" y="1828602"/>
+            <a:ext cx="5578678" cy="4555618"/>
+          </a:xfrm>
+          <a:prstGeom prst="rect">
+            <a:avLst/>
+          </a:prstGeom>
+        </p:spPr>
+      </p:pic>
+    </p:spTree>
+    <p:extLst>
+      <p:ext uri="{BB962C8B-B14F-4D97-AF65-F5344CB8AC3E}">
+        <p14:creationId xmlns:p14="http://schemas.microsoft.com/office/powerpoint/2010/main" val="678512195"/>
+      </p:ext>
+    </p:extLst>
+  </p:cSld>
+  <p:clrMapOvr>
+    <a:masterClrMapping/>
+  </p:clrMapOvr>
+  <mc:AlternateContent xmlns:mc="http://schemas.openxmlformats.org/markup-compatibility/2006">
+    <mc:Choice xmlns:p15="http://schemas.microsoft.com/office/powerpoint/2012/main" Requires="p15">
+      <p:transition xmlns:p14="http://schemas.microsoft.com/office/powerpoint/2010/main" spd="slow" p14:dur="2000">
+        <p15:prstTrans prst="drape"/>
+      </p:transition>
+    </mc:Choice>
+    <mc:Fallback>
+      <p:transition spd="slow">
+        <p:fade/>
+      </p:transition>
+    </mc:Fallback>
+  </mc:AlternateContent>
+</p:sld>
+</file>
+
+<file path=ppt/slides/slide7.xml><?xml version="1.0" encoding="utf-8"?>
+<p:sld xmlns:a="http://schemas.openxmlformats.org/drawingml/2006/main" xmlns:r="http://schemas.openxmlformats.org/officeDocument/2006/relationships" xmlns:p="http://schemas.openxmlformats.org/presentationml/2006/main">
+  <p:cSld>
+    <p:spTree>
+      <p:nvGrpSpPr>
+        <p:cNvPr id="1" name=""/>
+        <p:cNvGrpSpPr/>
+        <p:nvPr/>
+      </p:nvGrpSpPr>
+      <p:grpSpPr>
+        <a:xfrm>
+          <a:off x="0" y="0"/>
+          <a:ext cx="0" cy="0"/>
+          <a:chOff x="0" y="0"/>
+          <a:chExt cx="0" cy="0"/>
+        </a:xfrm>
+      </p:grpSpPr>
+      <p:sp>
+        <p:nvSpPr>
+          <p:cNvPr id="2" name="Cím 1">
+            <a:extLst>
+              <a:ext uri="{FF2B5EF4-FFF2-40B4-BE49-F238E27FC236}">
+                <a16:creationId xmlns:a16="http://schemas.microsoft.com/office/drawing/2014/main" id="{AA297CF9-31BA-483F-ADA1-24026B0C0FA2}"/>
+              </a:ext>
+            </a:extLst>
+          </p:cNvPr>
+          <p:cNvSpPr>
+            <a:spLocks noGrp="1"/>
+          </p:cNvSpPr>
+          <p:nvPr>
+            <p:ph type="title"/>
+          </p:nvPr>
+        </p:nvSpPr>
+        <p:spPr>
+          <a:xfrm>
+            <a:off x="913795" y="609600"/>
+            <a:ext cx="10353762" cy="970450"/>
+          </a:xfrm>
+        </p:spPr>
+        <p:txBody>
+          <a:bodyPr/>
+          <a:lstStyle/>
+          <a:p>
+            <a:r>
+              <a:rPr lang="hu-HU" dirty="0"/>
+              <a:t>JavaScript</a:t>
+            </a:r>
+          </a:p>
+        </p:txBody>
+      </p:sp>
+      <p:pic>
+        <p:nvPicPr>
+          <p:cNvPr id="3" name="Kép 2">
+            <a:extLst>
+              <a:ext uri="{FF2B5EF4-FFF2-40B4-BE49-F238E27FC236}">
+                <a16:creationId xmlns:a16="http://schemas.microsoft.com/office/drawing/2014/main" id="{205E6C3E-DA44-408A-9FA8-0E565C9A70BE}"/>
+              </a:ext>
+            </a:extLst>
+          </p:cNvPr>
+          <p:cNvPicPr>
+            <a:picLocks noChangeAspect="1"/>
+          </p:cNvPicPr>
+          <p:nvPr/>
+        </p:nvPicPr>
+        <p:blipFill>
+          <a:blip r:embed="rId2"/>
+          <a:stretch>
+            <a:fillRect/>
+          </a:stretch>
+        </p:blipFill>
+        <p:spPr>
+          <a:xfrm>
+            <a:off x="6090676" y="1735146"/>
+            <a:ext cx="4593710" cy="1010872"/>
+          </a:xfrm>
+          <a:prstGeom prst="rect">
+            <a:avLst/>
+          </a:prstGeom>
+        </p:spPr>
+      </p:pic>
+      <p:pic>
+        <p:nvPicPr>
+          <p:cNvPr id="4" name="Kép 3">
+            <a:extLst>
+              <a:ext uri="{FF2B5EF4-FFF2-40B4-BE49-F238E27FC236}">
+                <a16:creationId xmlns:a16="http://schemas.microsoft.com/office/drawing/2014/main" id="{C93E7552-9388-4AEE-AA00-262B7A91D069}"/>
+              </a:ext>
+            </a:extLst>
+          </p:cNvPr>
+          <p:cNvPicPr>
+            <a:picLocks noChangeAspect="1"/>
+          </p:cNvPicPr>
+          <p:nvPr/>
+        </p:nvPicPr>
+        <p:blipFill>
+          <a:blip r:embed="rId3"/>
+          <a:stretch>
+            <a:fillRect/>
+          </a:stretch>
+        </p:blipFill>
+        <p:spPr>
+          <a:xfrm>
+            <a:off x="6090676" y="3293629"/>
+            <a:ext cx="3286498" cy="270742"/>
+          </a:xfrm>
+          <a:prstGeom prst="rect">
+            <a:avLst/>
+          </a:prstGeom>
+        </p:spPr>
+      </p:pic>
+      <p:pic>
+        <p:nvPicPr>
+          <p:cNvPr id="5" name="Kép 4">
+            <a:extLst>
+              <a:ext uri="{FF2B5EF4-FFF2-40B4-BE49-F238E27FC236}">
+                <a16:creationId xmlns:a16="http://schemas.microsoft.com/office/drawing/2014/main" id="{F3E4BD78-E94D-4FB3-BE59-76219559B7BE}"/>
+              </a:ext>
+            </a:extLst>
+          </p:cNvPr>
+          <p:cNvPicPr>
+            <a:picLocks noChangeAspect="1"/>
+          </p:cNvPicPr>
+          <p:nvPr/>
+        </p:nvPicPr>
+        <p:blipFill>
+          <a:blip r:embed="rId4"/>
+          <a:stretch>
+            <a:fillRect/>
+          </a:stretch>
+        </p:blipFill>
+        <p:spPr>
+          <a:xfrm>
+            <a:off x="444875" y="1735146"/>
+            <a:ext cx="4739902" cy="3832400"/>
+          </a:xfrm>
+          <a:prstGeom prst="rect">
+            <a:avLst/>
+          </a:prstGeom>
+        </p:spPr>
+      </p:pic>
+    </p:spTree>
+    <p:extLst>
+      <p:ext uri="{BB962C8B-B14F-4D97-AF65-F5344CB8AC3E}">
+        <p14:creationId xmlns:p14="http://schemas.microsoft.com/office/powerpoint/2010/main" val="3686377224"/>
+      </p:ext>
+    </p:extLst>
+  </p:cSld>
+  <p:clrMapOvr>
+    <a:masterClrMapping/>
+  </p:clrMapOvr>
+  <mc:AlternateContent xmlns:mc="http://schemas.openxmlformats.org/markup-compatibility/2006">
+    <mc:Choice xmlns:p14="http://schemas.microsoft.com/office/powerpoint/2010/main" Requires="p14">
+      <p:transition spd="slow" p14:dur="3400">
+        <p14:reveal/>
+      </p:transition>
+    </mc:Choice>
+    <mc:Fallback>
+      <p:transition spd="slow">
+        <p:fade/>
+      </p:transition>
+    </mc:Fallback>
+  </mc:AlternateContent>
+</p:sld>
+</file>
+
+<file path=ppt/slides/slide8.xml><?xml version="1.0" encoding="utf-8"?>
+<p:sld xmlns:a="http://schemas.openxmlformats.org/drawingml/2006/main" xmlns:r="http://schemas.openxmlformats.org/officeDocument/2006/relationships" xmlns:p="http://schemas.openxmlformats.org/presentationml/2006/main">
+  <p:cSld>
+    <p:spTree>
+      <p:nvGrpSpPr>
+        <p:cNvPr id="1" name=""/>
+        <p:cNvGrpSpPr/>
+        <p:nvPr/>
+      </p:nvGrpSpPr>
+      <p:grpSpPr>
+        <a:xfrm>
+          <a:off x="0" y="0"/>
+          <a:ext cx="0" cy="0"/>
+          <a:chOff x="0" y="0"/>
+          <a:chExt cx="0" cy="0"/>
+        </a:xfrm>
+      </p:grpSpPr>
+      <p:sp>
+        <p:nvSpPr>
+          <p:cNvPr id="2" name="Cím 1">
+            <a:extLst>
+              <a:ext uri="{FF2B5EF4-FFF2-40B4-BE49-F238E27FC236}">
+                <a16:creationId xmlns:a16="http://schemas.microsoft.com/office/drawing/2014/main" id="{9B706EE9-A499-4FEC-A3A3-6FA156AB93BE}"/>
+              </a:ext>
+            </a:extLst>
+          </p:cNvPr>
+          <p:cNvSpPr>
+            <a:spLocks noGrp="1"/>
+          </p:cNvSpPr>
+          <p:nvPr>
+            <p:ph type="title"/>
+          </p:nvPr>
+        </p:nvSpPr>
+        <p:spPr>
+          <a:xfrm>
+            <a:off x="919119" y="2458550"/>
+            <a:ext cx="10353762" cy="970450"/>
+          </a:xfrm>
+        </p:spPr>
+        <p:txBody>
+          <a:bodyPr>
+            <a:noAutofit/>
+          </a:bodyPr>
+          <a:lstStyle/>
+          <a:p>
+            <a:r>
+              <a:rPr lang="hu-HU" sz="6700" dirty="0"/>
+              <a:t>Köszönjük a figyelmet!</a:t>
+            </a:r>
+          </a:p>
+        </p:txBody>
+      </p:sp>
+    </p:spTree>
+    <p:extLst>
+      <p:ext uri="{BB962C8B-B14F-4D97-AF65-F5344CB8AC3E}">
+        <p14:creationId xmlns:p14="http://schemas.microsoft.com/office/powerpoint/2010/main" val="2723548743"/>
+      </p:ext>
+    </p:extLst>
+  </p:cSld>
+  <p:clrMapOvr>
+    <a:masterClrMapping/>
+  </p:clrMapOvr>
+  <mc:AlternateContent xmlns:mc="http://schemas.openxmlformats.org/markup-compatibility/2006">
+    <mc:Choice xmlns:p15="http://schemas.microsoft.com/office/powerpoint/2012/main" Requires="p15">
+      <p:transition xmlns:p14="http://schemas.microsoft.com/office/powerpoint/2010/main" spd="slow" p14:dur="3250">
+        <p15:prstTrans prst="origami"/>
       </p:transition>
     </mc:Choice>
     <mc:Fallback>
